--- a/tests/fixtures/reference_docs/styled.pptx
+++ b/tests/fixtures/reference_docs/styled.pptx
@@ -6,9 +6,6 @@
   </p:sldMasterIdLst>
   <p:sldIdLst>
     <p:sldId id="256" r:id="rId7"/>
-    <p:sldId id="257" r:id="rId8"/>
-    <p:sldId id="258" r:id="rId9"/>
-    <p:sldId id="259" r:id="rId10"/>
   </p:sldIdLst>
   <p:sldSz cx="9144000" cy="6858000" type="screen4x3"/>
   <p:notesSz cx="6858000" cy="9144000"/>
@@ -3098,66 +3095,6 @@
             <a:spLocks noGrp="1"/>
           </p:cNvSpPr>
           <p:nvPr>
-            <p:ph type="ctrTitle"/>
-          </p:nvPr>
-        </p:nvSpPr>
-        <p:spPr/>
-        <p:txBody>
-          <a:bodyPr/>
-          <a:lstStyle/>
-          <a:p>
-            <a:r>
-              <a:t>Styled Presentation</a:t>
-            </a:r>
-          </a:p>
-        </p:txBody>
-      </p:sp>
-      <p:sp>
-        <p:nvSpPr>
-          <p:cNvPr id="3" name="Subtitle 2"/>
-          <p:cNvSpPr>
-            <a:spLocks noGrp="1"/>
-          </p:cNvSpPr>
-          <p:nvPr>
-            <p:ph type="subTitle" idx="1"/>
-          </p:nvPr>
-        </p:nvSpPr>
-        <p:spPr/>
-        <p:txBody>
-          <a:bodyPr/>
-          <a:lstStyle/>
-          <a:p>
-            <a:r>
-              <a:t>With various formatting</a:t>
-            </a:r>
-          </a:p>
-        </p:txBody>
-      </p:sp>
-    </p:spTree>
-  </p:cSld>
-  <p:clrMapOvr>
-    <a:masterClrMapping/>
-  </p:clrMapOvr>
-</p:sld>
-</file>
-
-<file path=ppt/slides/slide2.xml><?xml version="1.0" encoding="utf-8"?>
-<p:sld xmlns:a="http://schemas.openxmlformats.org/drawingml/2006/main" xmlns:p="http://schemas.openxmlformats.org/presentationml/2006/main" xmlns:r="http://schemas.openxmlformats.org/officeDocument/2006/relationships">
-  <p:cSld>
-    <p:spTree>
-      <p:nvGrpSpPr>
-        <p:cNvPr id="1" name=""/>
-        <p:cNvGrpSpPr/>
-        <p:nvPr/>
-      </p:nvGrpSpPr>
-      <p:grpSpPr/>
-      <p:sp>
-        <p:nvSpPr>
-          <p:cNvPr id="2" name="Title 1"/>
-          <p:cNvSpPr>
-            <a:spLocks noGrp="1"/>
-          </p:cNvSpPr>
-          <p:nvPr>
             <p:ph type="title"/>
           </p:nvPr>
         </p:nvSpPr>
@@ -3165,166 +3102,19 @@
         <p:txBody>
           <a:bodyPr/>
           <a:lstStyle/>
-          <a:p>
-            <a:r>
-              <a:t>Text Formatting</a:t>
-            </a:r>
-          </a:p>
-        </p:txBody>
-      </p:sp>
-      <p:sp>
-        <p:nvSpPr>
-          <p:cNvPr id="3" name="Content Placeholder 2"/>
-          <p:cNvSpPr>
-            <a:spLocks noGrp="1"/>
-          </p:cNvSpPr>
-          <p:nvPr>
-            <p:ph idx="1"/>
-          </p:nvPr>
-        </p:nvSpPr>
-        <p:spPr/>
-        <p:txBody>
-          <a:bodyPr/>
-          <a:lstStyle/>
-          <a:p>
-            <a:pPr/>
-            <a:r>
-              <a:t>Bold text</a:t>
-            </a:r>
-          </a:p>
-          <a:p>
-            <a:pPr/>
-            <a:r>
-              <a:t>Italic text</a:t>
-            </a:r>
-          </a:p>
-          <a:p>
-            <a:pPr/>
-            <a:r>
-              <a:rPr>
-                <a:solidFill>
-                  <a:srgbClr val="FF0000"/>
-                </a:solidFill>
-              </a:rPr>
-              <a:t>Colored text</a:t>
-            </a:r>
-          </a:p>
-          <a:p>
-            <a:pPr/>
-            <a:r>
-              <a:rPr sz="2400"/>
-              <a:t>Large text (24pt)</a:t>
-            </a:r>
-          </a:p>
-        </p:txBody>
-      </p:sp>
-    </p:spTree>
-  </p:cSld>
-  <p:clrMapOvr>
-    <a:masterClrMapping/>
-  </p:clrMapOvr>
-</p:sld>
-</file>
-
-<file path=ppt/slides/slide3.xml><?xml version="1.0" encoding="utf-8"?>
-<p:sld xmlns:a="http://schemas.openxmlformats.org/drawingml/2006/main" xmlns:p="http://schemas.openxmlformats.org/presentationml/2006/main" xmlns:r="http://schemas.openxmlformats.org/officeDocument/2006/relationships">
-  <p:cSld>
-    <p:spTree>
-      <p:nvGrpSpPr>
-        <p:cNvPr id="1" name=""/>
-        <p:cNvGrpSpPr/>
-        <p:nvPr/>
-      </p:nvGrpSpPr>
-      <p:grpSpPr/>
-      <p:sp>
-        <p:nvSpPr>
-          <p:cNvPr id="2" name="Title 1"/>
-          <p:cNvSpPr>
-            <a:spLocks noGrp="1"/>
-          </p:cNvSpPr>
-          <p:nvPr>
-            <p:ph type="title"/>
-          </p:nvPr>
-        </p:nvSpPr>
-        <p:spPr/>
-        <p:txBody>
-          <a:bodyPr/>
-          <a:lstStyle/>
-          <a:p>
-            <a:r>
-              <a:t>Bullet List</a:t>
-            </a:r>
-          </a:p>
-        </p:txBody>
-      </p:sp>
-      <p:sp>
-        <p:nvSpPr>
-          <p:cNvPr id="3" name="Content Placeholder 2"/>
-          <p:cNvSpPr>
-            <a:spLocks noGrp="1"/>
-          </p:cNvSpPr>
-          <p:nvPr>
-            <p:ph idx="1"/>
-          </p:nvPr>
-        </p:nvSpPr>
-        <p:spPr/>
-        <p:txBody>
-          <a:bodyPr/>
-          <a:lstStyle/>
-          <a:p>
-            <a:pPr/>
-            <a:r>
-              <a:t>First item</a:t>
-            </a:r>
-          </a:p>
-          <a:p>
-            <a:pPr/>
-            <a:r>
-              <a:t>Second item</a:t>
-            </a:r>
-          </a:p>
-          <a:p>
-            <a:pPr lvl="1"/>
-            <a:r>
-              <a:t>Nested item</a:t>
-            </a:r>
-          </a:p>
-          <a:p>
-            <a:pPr/>
-            <a:r>
-              <a:t>Third item</a:t>
-            </a:r>
-          </a:p>
-        </p:txBody>
-      </p:sp>
-    </p:spTree>
-  </p:cSld>
-  <p:clrMapOvr>
-    <a:masterClrMapping/>
-  </p:clrMapOvr>
-</p:sld>
-</file>
-
-<file path=ppt/slides/slide4.xml><?xml version="1.0" encoding="utf-8"?>
-<p:sld xmlns:a="http://schemas.openxmlformats.org/drawingml/2006/main" xmlns:p="http://schemas.openxmlformats.org/presentationml/2006/main" xmlns:r="http://schemas.openxmlformats.org/officeDocument/2006/relationships">
-  <p:cSld>
-    <p:spTree>
-      <p:nvGrpSpPr>
-        <p:cNvPr id="1" name=""/>
-        <p:cNvGrpSpPr/>
-        <p:nvPr/>
-      </p:nvGrpSpPr>
-      <p:grpSpPr/>
-      <p:sp>
-        <p:nvSpPr>
-          <p:cNvPr id="2" name="TextBox 1"/>
+          <a:p/>
+        </p:txBody>
+      </p:sp>
+      <p:sp>
+        <p:nvSpPr>
+          <p:cNvPr id="3" name="TextBox 2"/>
           <p:cNvSpPr txBox="1"/>
           <p:nvPr/>
         </p:nvSpPr>
         <p:spPr>
           <a:xfrm>
             <a:off x="914400" y="914400"/>
-            <a:ext cx="7315200" cy="914400"/>
+            <a:ext cx="7315200" cy="4572000"/>
           </a:xfrm>
           <a:prstGeom prst="rect">
             <a:avLst/>
@@ -3332,52 +3122,44 @@
           <a:noFill/>
         </p:spPr>
         <p:txBody>
-          <a:bodyPr wrap="none">
+          <a:bodyPr wrap="square">
             <a:spAutoFit/>
           </a:bodyPr>
           <a:lstStyle/>
           <a:p>
             <a:r>
-              <a:t>This is a text box on a blank slide</a:t>
-            </a:r>
-          </a:p>
-        </p:txBody>
-      </p:sp>
-      <p:sp>
-        <p:nvSpPr>
-          <p:cNvPr id="3" name="Rectangle 2"/>
-          <p:cNvSpPr/>
-          <p:nvPr/>
-        </p:nvSpPr>
-        <p:spPr>
-          <a:xfrm>
-            <a:off x="1828800" y="2743200"/>
-            <a:ext cx="3657600" cy="1828800"/>
-          </a:xfrm>
-          <a:prstGeom prst="rect">
-            <a:avLst/>
-          </a:prstGeom>
-        </p:spPr>
-        <p:style>
-          <a:lnRef idx="1">
-            <a:schemeClr val="accent1"/>
-          </a:lnRef>
-          <a:fillRef idx="3">
-            <a:schemeClr val="accent1"/>
-          </a:fillRef>
-          <a:effectRef idx="2">
-            <a:schemeClr val="accent1"/>
-          </a:effectRef>
-          <a:fontRef idx="minor">
-            <a:schemeClr val="lt1"/>
-          </a:fontRef>
-        </p:style>
-        <p:txBody>
-          <a:bodyPr rtlCol="0" anchor="ctr"/>
-          <a:lstStyle/>
-          <a:p>
-            <a:r>
-              <a:t>Rectangle Shape</a:t>
+              <a:rPr b="1" sz="2400"/>
+              <a:t>Bold text</a:t>
+            </a:r>
+          </a:p>
+          <a:p>
+            <a:r>
+              <a:rPr i="1" sz="2400"/>
+              <a:t>Italic text</a:t>
+            </a:r>
+          </a:p>
+          <a:p>
+            <a:r>
+              <a:rPr sz="2400">
+                <a:solidFill>
+                  <a:srgbClr val="FF0000"/>
+                </a:solidFill>
+              </a:rPr>
+              <a:t>Red colored text</a:t>
+            </a:r>
+          </a:p>
+          <a:p>
+            <a:r>
+              <a:rPr u="sng" sz="2400"/>
+              <a:t>Underlined text</a:t>
+            </a:r>
+          </a:p>
+          <a:p>
+            <a:r>
+              <a:rPr sz="2400">
+                <a:latin typeface="Arial"/>
+              </a:rPr>
+              <a:t>Arial font</a:t>
             </a:r>
           </a:p>
         </p:txBody>
